--- a/docs/apresentacao-apoio-demo.pptx
+++ b/docs/apresentacao-apoio-demo.pptx
@@ -6020,7 +6020,7 @@
                 </a:solidFill>
                 <a:latin typeface="Segoe UI"/>
               </a:rPr>
-              <a:t>Defeitos: 19 registrados e fechados</a:t>
+              <a:t>Defeitos: 15 registrados e fechados</a:t>
             </a:r>
           </a:p>
         </p:txBody>

--- a/docs/apresentacao-apoio-demo.pptx
+++ b/docs/apresentacao-apoio-demo.pptx
@@ -7116,7 +7116,7 @@
                 </a:solidFill>
                 <a:latin typeface="Segoe UI"/>
               </a:rPr>
-              <a:t>Executar mutação (~5 min) → 196/204 mortos; Execução e métricas mostra a evolução</a:t>
+              <a:t>Executar mutação (~6 min) → 181/189 mortos; Execução e métricas mostra a evolução</a:t>
             </a:r>
           </a:p>
         </p:txBody>

--- a/docs/apresentacao-apoio-demo.pptx
+++ b/docs/apresentacao-apoio-demo.pptx
@@ -5308,7 +5308,7 @@
                 </a:solidFill>
                 <a:latin typeface="Segoe UI"/>
               </a:rPr>
-              <a:t>• Funcional (valor limite): CT-021/022 (estadias adjacentes), CT-061/062 (1 dia de folga) e CT-023 (período distante): todos recusados no original</a:t>
+              <a:t>• Funcional (valor limite): CT-003 (entrar no dia em que a outra estadia sai) foi recusado no original</a:t>
             </a:r>
           </a:p>
           <a:p>
@@ -5324,7 +5324,7 @@
                 </a:solidFill>
                 <a:latin typeface="Segoe UI"/>
               </a:rPr>
-              <a:t>• Consulta: CT-033 a CT-035, CT-063 e CT-064: o quarto livre some da lista</a:t>
+              <a:t>• Estrutural: CT-019 revelou DEF-15 (produto cartesiano), escondido pela tautologia até ela ser corrigida</a:t>
             </a:r>
           </a:p>
           <a:p>
@@ -5340,7 +5340,7 @@
                 </a:solidFill>
                 <a:latin typeface="Segoe UI"/>
               </a:rPr>
-              <a:t>• Estrutural: CT-045 revelou DEF-15 (produto cartesiano), escondido pela tautologia até ela ser corrigida</a:t>
+              <a:t>• Mutação: CT-020 e CT-021 mataram mutantes do predicado corrigido (sair no dia em que a outra entra; período anterior)</a:t>
             </a:r>
           </a:p>
           <a:p>
@@ -5356,7 +5356,7 @@
                 </a:solidFill>
                 <a:latin typeface="Segoe UI"/>
               </a:rPr>
-              <a:t>• Mutação: CT-055 matou o mutante Booked.brid &gt;= Reservations.rid na junção corrigida</a:t>
+              <a:t>• Mutação: CT-022 matou o mutante Booked.brid &gt;= Reservations.rid na junção corrigida</a:t>
             </a:r>
           </a:p>
         </p:txBody>
@@ -5768,14 +5768,14 @@
                 </a:solidFill>
                 <a:latin typeface="Segoe UI"/>
               </a:rPr>
-              <a:t>Visão geral</a:t>
+              <a:t>Visão geral das três etapas</a:t>
             </a:r>
           </a:p>
         </p:txBody>
       </p:sp>
       <p:pic>
         <p:nvPicPr>
-          <p:cNvPr id="10" name="Picture 9" descr="03-casos.png"/>
+          <p:cNvPr id="10" name="Picture 9" descr="09-teste-funcional-detalhe.png"/>
           <p:cNvPicPr>
             <a:picLocks noChangeAspect="1"/>
           </p:cNvPicPr>
@@ -5852,14 +5852,14 @@
                 </a:solidFill>
                 <a:latin typeface="Segoe UI"/>
               </a:rPr>
-              <a:t>Cenários e casos (CE, AVL, estruturais, mutação)</a:t>
+              <a:t>Teste funcional: entrada, esperado, obtido e assertivas</a:t>
             </a:r>
           </a:p>
         </p:txBody>
       </p:sp>
       <p:pic>
         <p:nvPicPr>
-          <p:cNvPr id="12" name="Picture 11" descr="05-execucao-metricas.png"/>
+          <p:cNvPr id="12" name="Picture 11" descr="10-teste-estrutural-grafo.png"/>
           <p:cNvPicPr>
             <a:picLocks noChangeAspect="1"/>
           </p:cNvPicPr>
@@ -5936,14 +5936,14 @@
                 </a:solidFill>
                 <a:latin typeface="Segoe UI"/>
               </a:rPr>
-              <a:t>Execução e métricas: evolução por etapa</a:t>
+              <a:t>Teste estrutural: grafo percorrido pelo caso</a:t>
             </a:r>
           </a:p>
         </p:txBody>
       </p:sp>
       <p:pic>
         <p:nvPicPr>
-          <p:cNvPr id="14" name="Picture 13" descr="07-defeitos.png"/>
+          <p:cNvPr id="14" name="Picture 13" descr="11-teste-mutacao.png"/>
           <p:cNvPicPr>
             <a:picLocks noChangeAspect="1"/>
           </p:cNvPicPr>
@@ -6020,7 +6020,7 @@
                 </a:solidFill>
                 <a:latin typeface="Segoe UI"/>
               </a:rPr>
-              <a:t>Defeitos: 15 registrados e fechados</a:t>
+              <a:t>Teste de mutação: cálculo do escore e mutantes</a:t>
             </a:r>
           </a:p>
         </p:txBody>
@@ -7116,7 +7116,7 @@
                 </a:solidFill>
                 <a:latin typeface="Segoe UI"/>
               </a:rPr>
-              <a:t>Executar mutação (~6 min) → 181/189 mortos; Execução e métricas mostra a evolução</a:t>
+              <a:t>Executar mutação (~4 min) → 134/141 mortos; página Teste de mutação mostra o cálculo</a:t>
             </a:r>
           </a:p>
         </p:txBody>

--- a/docs/apresentacao-apoio-demo.pptx
+++ b/docs/apresentacao-apoio-demo.pptx
@@ -4443,7 +4443,7 @@
                 </a:solidFill>
                 <a:latin typeface="Segoe UI"/>
               </a:rPr>
-              <a:t>Consulta de disponibilidade: D+20 a D+22, 4 hóspedes</a:t>
+              <a:t>Consulta de disponibilidade: 20/10/2026 a 22/10/2026, 4 hóspedes</a:t>
             </a:r>
           </a:p>
         </p:txBody>
@@ -4611,7 +4611,7 @@
                 </a:solidFill>
                 <a:latin typeface="Segoe UI"/>
               </a:rPr>
-              <a:t>Corrigido: só o 103 comporta 4 hóspedes</a:t>
+              <a:t>Corrigido: só o quarto de capacidade 4 aparece</a:t>
             </a:r>
           </a:p>
         </p:txBody>
@@ -5308,7 +5308,7 @@
                 </a:solidFill>
                 <a:latin typeface="Segoe UI"/>
               </a:rPr>
-              <a:t>• Funcional (valor limite): CT-003 (entrar no dia em que a outra estadia sai) foi recusado no original</a:t>
+              <a:t>• Funcional (valor limite): CT-003 (entrar em 12/03/2030, dia em que a outra estadia sai) foi recusado no original</a:t>
             </a:r>
           </a:p>
           <a:p>
@@ -5324,7 +5324,7 @@
                 </a:solidFill>
                 <a:latin typeface="Segoe UI"/>
               </a:rPr>
-              <a:t>• Estrutural: CT-019 revelou DEF-15 (produto cartesiano), escondido pela tautologia até ela ser corrigida</a:t>
+              <a:t>• Estrutural: a ampliação do CT-012 revelou DEF-15 (produto cartesiano), escondido pela tautologia até ela ser corrigida</a:t>
             </a:r>
           </a:p>
           <a:p>
@@ -5340,7 +5340,7 @@
                 </a:solidFill>
                 <a:latin typeface="Segoe UI"/>
               </a:rPr>
-              <a:t>• Mutação: CT-020 e CT-021 mataram mutantes do predicado corrigido (sair no dia em que a outra entra; período anterior)</a:t>
+              <a:t>• Mutação: a ampliação do CT-003 (sair em 10/03, dia em que a outra entra; estadia antes) matou 3 mutantes do predicado</a:t>
             </a:r>
           </a:p>
           <a:p>
@@ -5356,7 +5356,7 @@
                 </a:solidFill>
                 <a:latin typeface="Segoe UI"/>
               </a:rPr>
-              <a:t>• Mutação: CT-022 matou o mutante Booked.brid &gt;= Reservations.rid na junção corrigida</a:t>
+              <a:t>• Mutação: a ampliação do CT-012 matou o mutante Booked.brid &gt;= Reservations.rid na junção corrigida</a:t>
             </a:r>
           </a:p>
         </p:txBody>
